--- a/public/templates/office/EMP_ANL_040_ASIS_프로세스정의서.pptx
+++ b/public/templates/office/EMP_ANL_040_ASIS_프로세스정의서.pptx
@@ -3163,7 +3163,7 @@
               </a:defRPr>
             </a:pPr>
             <a:r>
-              <a:t>HANBIT GLOBAL SyncGuard AI</a:t>
+              <a:t>HANBIT GLOBAL SyncFlow AI</a:t>
             </a:r>
           </a:p>
           <a:p>
@@ -3193,7 +3193,7 @@
               </a:defRPr>
             </a:pPr>
             <a:r>
-              <a:t>한빛글로벌 현행 제품 표시·광고 심의 업무 흐름 및 문제점 분석</a:t>
+              <a:t>한빛글로벌 현행 구매계약·기술규격 검증 업무 흐름 및 문제점 분석</a:t>
             </a:r>
           </a:p>
         </p:txBody>
@@ -3213,7 +3213,7 @@
             <a:avLst/>
           </a:prstGeom>
           <a:solidFill>
-            <a:srgbClr val="1E293B"/>
+            <a:srgbClr val="0F2942"/>
           </a:solidFill>
         </p:spPr>
         <p:style>
@@ -3280,7 +3280,7 @@
               </a:defRPr>
             </a:pPr>
             <a:r>
-              <a:t>분석 범위: 마케팅 문안 기획, 이메일 심의 접수, 수기 법령 대조, ProductLab 수동 조회, 수정 피드백 및 결재</a:t>
+              <a:t>분석 범위: 구매조달 계약조항 기획, 이메일 검증 접수, 수기 법령 대조, PLM-Nexus 수동 조회, 수정 피드백 및 결재</a:t>
             </a:r>
           </a:p>
           <a:p>
@@ -3425,7 +3425,7 @@
               </a:defRPr>
             </a:pPr>
             <a:r>
-              <a:t>1.1 현행(AS-IS) 표시광고 심의 업무 흐름도</a:t>
+              <a:t>1.1 현행(AS-IS) 계약·기술규격 검증 업무 흐름도</a:t>
             </a:r>
           </a:p>
         </p:txBody>
@@ -3455,7 +3455,7 @@
             <a:pPr algn="r">
               <a:defRPr sz="1000" b="1">
                 <a:solidFill>
-                  <a:srgbClr val="1E293B"/>
+                  <a:srgbClr val="0F2942"/>
                 </a:solidFill>
               </a:defRPr>
             </a:pPr>
@@ -3540,7 +3540,7 @@
               </a:defRPr>
             </a:pPr>
             <a:r>
-              <a:t>SyncGuard AI | AS-IS 프로세스 정의서</a:t>
+              <a:t>SyncFlow AI | AS-IS 프로세스 정의서</a:t>
             </a:r>
           </a:p>
         </p:txBody>
@@ -3686,7 +3686,7 @@
               </a:defRPr>
             </a:pPr>
             <a:r>
-              <a:t>Step 1. 심의 요청</a:t>
+              <a:t>Step 1. 검증 요청</a:t>
             </a:r>
           </a:p>
           <a:p>
@@ -3701,7 +3701,7 @@
               </a:defRPr>
             </a:pPr>
             <a:r>
-              <a:t>담당: 마케팅 담당자</a:t>
+              <a:t>담당: 구매조달 담당자</a:t>
             </a:r>
           </a:p>
           <a:p>
@@ -3711,16 +3711,16 @@
               </a:spcBef>
               <a:defRPr sz="950">
                 <a:solidFill>
-                  <a:srgbClr val="334155"/>
-                </a:solidFill>
-              </a:defRPr>
-            </a:pPr>
-            <a:r>
-              <a:t>문안 기획 및 상세페이지 제작</a:t>
+                  <a:srgbClr val="1E3A5F"/>
+                </a:solidFill>
+              </a:defRPr>
+            </a:pPr>
+            <a:r>
+              <a:t>계약조항 기획 및 기술시방서 제작</a:t>
             </a:r>
             <a:br/>
             <a:r>
-              <a:t>사내 이메일/메신저로 RA팀에 심의 요청 전달</a:t>
+              <a:t>사내 이메일/메신저로 QA팀에 검증 요청 전달</a:t>
             </a:r>
             <a:br/>
             <a:r>
@@ -3819,7 +3819,7 @@
               </a:defRPr>
             </a:pPr>
             <a:r>
-              <a:t>담당: RA 심의 담당자</a:t>
+              <a:t>담당: QA 검증 담당자</a:t>
             </a:r>
           </a:p>
           <a:p>
@@ -3829,7 +3829,7 @@
               </a:spcBef>
               <a:defRPr sz="950">
                 <a:solidFill>
-                  <a:srgbClr val="334155"/>
+                  <a:srgbClr val="1E3A5F"/>
                 </a:solidFill>
               </a:defRPr>
             </a:pPr>
@@ -3838,11 +3838,11 @@
             </a:r>
             <a:br/>
             <a:r>
-              <a:t>제품 코드 확인 후 ProductLab 시스템 개별 로그인</a:t>
+              <a:t>제품 코드 확인 후 PLM-Nexus 시스템 개별 로그인</a:t>
             </a:r>
             <a:br/>
             <a:r>
-              <a:t>전성분 및 배합 규격 수동 조회</a:t>
+              <a:t>자재BOM 및 조성 규격 수동 조회</a:t>
             </a:r>
           </a:p>
         </p:txBody>
@@ -3866,7 +3866,7 @@
           </a:solidFill>
           <a:ln w="19050">
             <a:solidFill>
-              <a:srgbClr val="1E293B"/>
+              <a:srgbClr val="0F2942"/>
             </a:solidFill>
           </a:ln>
         </p:spPr>
@@ -3917,7 +3917,7 @@
             <a:pPr>
               <a:defRPr b="1" sz="1200">
                 <a:solidFill>
-                  <a:srgbClr val="1E293B"/>
+                  <a:srgbClr val="0F2942"/>
                 </a:solidFill>
               </a:defRPr>
             </a:pPr>
@@ -3937,7 +3937,7 @@
               </a:defRPr>
             </a:pPr>
             <a:r>
-              <a:t>담당: RA 심의 담당자</a:t>
+              <a:t>담당: QA 검증 담당자</a:t>
             </a:r>
           </a:p>
           <a:p>
@@ -3947,16 +3947,16 @@
               </a:spcBef>
               <a:defRPr sz="950">
                 <a:solidFill>
-                  <a:srgbClr val="334155"/>
-                </a:solidFill>
-              </a:defRPr>
-            </a:pPr>
-            <a:r>
-              <a:t>식약처 표시·광고 공정화법 제3조 및 가이드라인 PDF 검색</a:t>
+                  <a:srgbClr val="1E3A5F"/>
+                </a:solidFill>
+              </a:defRPr>
+            </a:pPr>
+            <a:r>
+              <a:t>공정위·표준원 하도급법 제3조의4 및 가이드라인 PDF 검색</a:t>
             </a:r>
             <a:br/>
             <a:r>
-              <a:t>과거 판례 및 행정처분 문서 수동 탐색</a:t>
+              <a:t>과거 판례 및 시정명령·심결 문서 수동 탐색</a:t>
             </a:r>
             <a:br/>
             <a:r>
@@ -4055,7 +4055,7 @@
               </a:defRPr>
             </a:pPr>
             <a:r>
-              <a:t>담당: 마케터 &amp; RA</a:t>
+              <a:t>담당: 구매담당자 &amp; QA</a:t>
             </a:r>
           </a:p>
           <a:p>
@@ -4065,7 +4065,7 @@
               </a:spcBef>
               <a:defRPr sz="950">
                 <a:solidFill>
-                  <a:srgbClr val="334155"/>
+                  <a:srgbClr val="1E3A5F"/>
                 </a:solidFill>
               </a:defRPr>
             </a:pPr>
@@ -4074,7 +4074,7 @@
             </a:r>
             <a:br/>
             <a:r>
-              <a:t>문안 수정 후 MarketingHub 결재 수기 상신</a:t>
+              <a:t>계약조항 수정 후 SRM-Portal 결재 수기 상신</a:t>
             </a:r>
             <a:br/>
             <a:r>
@@ -4211,7 +4211,7 @@
               </a:defRPr>
             </a:pPr>
             <a:r>
-              <a:t>2.1 현행 심의 업무의 4대 핵심 페인포인트(Pain Points)</a:t>
+              <a:t>2.1 현행 검증 업무의 4대 핵심 페인포인트(Pain Points)</a:t>
             </a:r>
           </a:p>
         </p:txBody>
@@ -4241,7 +4241,7 @@
             <a:pPr algn="r">
               <a:defRPr sz="1000" b="1">
                 <a:solidFill>
-                  <a:srgbClr val="1E293B"/>
+                  <a:srgbClr val="0F2942"/>
                 </a:solidFill>
               </a:defRPr>
             </a:pPr>
@@ -4326,7 +4326,7 @@
               </a:defRPr>
             </a:pPr>
             <a:r>
-              <a:t>SyncGuard AI | AS-IS 프로세스 정의서</a:t>
+              <a:t>SyncFlow AI | AS-IS 프로세스 정의서</a:t>
             </a:r>
           </a:p>
         </p:txBody>
@@ -4472,7 +4472,7 @@
               </a:defRPr>
             </a:pPr>
             <a:r>
-              <a:t>1. 심의 리드타임 과다 소요 (평균 3일)</a:t>
+              <a:t>1. 검증 리드타임 과다 소요 (평균 3일)</a:t>
             </a:r>
           </a:p>
           <a:p>
@@ -4482,12 +4482,12 @@
               </a:spcBef>
               <a:defRPr sz="950">
                 <a:solidFill>
-                  <a:srgbClr val="334155"/>
-                </a:solidFill>
-              </a:defRPr>
-            </a:pPr>
-            <a:r>
-              <a:t>• 이메일 기반 접수 및 수작업 검토로 인해 심의 대기 시간 장기화</a:t>
+                  <a:srgbClr val="1E3A5F"/>
+                </a:solidFill>
+              </a:defRPr>
+            </a:pPr>
+            <a:r>
+              <a:t>• 이메일 기반 접수 및 수작업 검토로 인해 검토 대기 시간 장기화</a:t>
             </a:r>
           </a:p>
           <a:p>
@@ -4497,12 +4497,12 @@
               </a:spcBef>
               <a:defRPr sz="950">
                 <a:solidFill>
-                  <a:srgbClr val="334155"/>
-                </a:solidFill>
-              </a:defRPr>
-            </a:pPr>
-            <a:r>
-              <a:t>• 신제품 런칭 및 프로모션 긴급 심의 시 업무 병목 현상 극심</a:t>
+                  <a:srgbClr val="1E3A5F"/>
+                </a:solidFill>
+              </a:defRPr>
+            </a:pPr>
+            <a:r>
+              <a:t>• 신규 차종 양산발주 및 단가계약 긴급 검증 시 업무 병목 현상 극심</a:t>
             </a:r>
           </a:p>
           <a:p>
@@ -4512,12 +4512,12 @@
               </a:spcBef>
               <a:defRPr sz="950">
                 <a:solidFill>
-                  <a:srgbClr val="334155"/>
-                </a:solidFill>
-              </a:defRPr>
-            </a:pPr>
-            <a:r>
-              <a:t>• 월말/시즌별 요청 폭증 시 심의 품질 저하 우려</a:t>
+                  <a:srgbClr val="1E3A5F"/>
+                </a:solidFill>
+              </a:defRPr>
+            </a:pPr>
+            <a:r>
+              <a:t>• 월말/시즌별 요청 폭증 시 검증 품질 저하 우려</a:t>
             </a:r>
           </a:p>
         </p:txBody>
@@ -4607,7 +4607,7 @@
               </a:spcBef>
               <a:defRPr sz="950">
                 <a:solidFill>
-                  <a:srgbClr val="334155"/>
+                  <a:srgbClr val="1E3A5F"/>
                 </a:solidFill>
               </a:defRPr>
             </a:pPr>
@@ -4622,12 +4622,12 @@
               </a:spcBef>
               <a:defRPr sz="950">
                 <a:solidFill>
-                  <a:srgbClr val="334155"/>
-                </a:solidFill>
-              </a:defRPr>
-            </a:pPr>
-            <a:r>
-              <a:t>• 브랜드별 심의 기준 불일치로 마케팅 부서와의 잦은 마찰</a:t>
+                  <a:srgbClr val="1E3A5F"/>
+                </a:solidFill>
+              </a:defRPr>
+            </a:pPr>
+            <a:r>
+              <a:t>• 사업부별 검증 기준 불일치로 구매조달 부서와의 잦은 마찰</a:t>
             </a:r>
           </a:p>
           <a:p>
@@ -4637,12 +4637,12 @@
               </a:spcBef>
               <a:defRPr sz="950">
                 <a:solidFill>
-                  <a:srgbClr val="334155"/>
-                </a:solidFill>
-              </a:defRPr>
-            </a:pPr>
-            <a:r>
-              <a:t>• 과거 심의 이력 검색 불가로 동일 표현에 대한 판정 번복 위험</a:t>
+                  <a:srgbClr val="1E3A5F"/>
+                </a:solidFill>
+              </a:defRPr>
+            </a:pPr>
+            <a:r>
+              <a:t>• 과거 검증 이력 검색 불가로 동일 표현에 대한 판정 번복 위험</a:t>
             </a:r>
           </a:p>
         </p:txBody>
@@ -4732,12 +4732,12 @@
               </a:spcBef>
               <a:defRPr sz="950">
                 <a:solidFill>
-                  <a:srgbClr val="334155"/>
-                </a:solidFill>
-              </a:defRPr>
-            </a:pPr>
-            <a:r>
-              <a:t>• 심의 시 ProductLab(배합성분)에 별도 로그인하여 수기 대조</a:t>
+                  <a:srgbClr val="1E3A5F"/>
+                </a:solidFill>
+              </a:defRPr>
+            </a:pPr>
+            <a:r>
+              <a:t>• 검증 시 PLM-Nexus(조성성분)에 별도 로그인하여 수기 대조</a:t>
             </a:r>
           </a:p>
           <a:p>
@@ -4747,7 +4747,7 @@
               </a:spcBef>
               <a:defRPr sz="950">
                 <a:solidFill>
-                  <a:srgbClr val="334155"/>
+                  <a:srgbClr val="1E3A5F"/>
                 </a:solidFill>
               </a:defRPr>
             </a:pPr>
@@ -4762,12 +4762,12 @@
               </a:spcBef>
               <a:defRPr sz="950">
                 <a:solidFill>
-                  <a:srgbClr val="334155"/>
-                </a:solidFill>
-              </a:defRPr>
-            </a:pPr>
-            <a:r>
-              <a:t>• 결재 포털(MarketingHub)과 심의 이력이 연계되지 않아 이중 작업</a:t>
+                  <a:srgbClr val="1E3A5F"/>
+                </a:solidFill>
+              </a:defRPr>
+            </a:pPr>
+            <a:r>
+              <a:t>• 결재 포털(SRM-Portal)과 검증 이력이 연계되지 않아 이중 작업</a:t>
             </a:r>
           </a:p>
         </p:txBody>
@@ -4857,12 +4857,12 @@
               </a:spcBef>
               <a:defRPr sz="950">
                 <a:solidFill>
-                  <a:srgbClr val="334155"/>
-                </a:solidFill>
-              </a:defRPr>
-            </a:pPr>
-            <a:r>
-              <a:t>• 단순히 '사용 불가' 통보만 하거나, RA가 대체 카피를 직접 고민해야 함</a:t>
+                  <a:srgbClr val="1E3A5F"/>
+                </a:solidFill>
+              </a:defRPr>
+            </a:pPr>
+            <a:r>
+              <a:t>• 단순히 '사용 불가' 통보만 하거나, QA가 대체 조항를 직접 고민해야 함</a:t>
             </a:r>
           </a:p>
           <a:p>
@@ -4872,12 +4872,12 @@
               </a:spcBef>
               <a:defRPr sz="950">
                 <a:solidFill>
-                  <a:srgbClr val="334155"/>
-                </a:solidFill>
-              </a:defRPr>
-            </a:pPr>
-            <a:r>
-              <a:t>• 적법하면서도 마케팅 소구력을 갖춘 대체 표현 발굴에 많은 시간 소모</a:t>
+                  <a:srgbClr val="1E3A5F"/>
+                </a:solidFill>
+              </a:defRPr>
+            </a:pPr>
+            <a:r>
+              <a:t>• 적법하면서도 구매조달 기술사양력을 갖춘 대체 표현 발굴에 많은 시간 소모</a:t>
             </a:r>
           </a:p>
           <a:p>
@@ -4887,12 +4887,12 @@
               </a:spcBef>
               <a:defRPr sz="950">
                 <a:solidFill>
-                  <a:srgbClr val="334155"/>
-                </a:solidFill>
-              </a:defRPr>
-            </a:pPr>
-            <a:r>
-              <a:t>• 마케터-RA 간 2~3회 이상의 지루한 이메일 핑퐁 발생</a:t>
+                  <a:srgbClr val="1E3A5F"/>
+                </a:solidFill>
+              </a:defRPr>
+            </a:pPr>
+            <a:r>
+              <a:t>• 구매담당자-QA 간 2~3회 이상의 지루한 이메일 핑퐁 발생</a:t>
             </a:r>
           </a:p>
         </p:txBody>
@@ -5055,7 +5055,7 @@
             <a:pPr algn="r">
               <a:defRPr sz="1000" b="1">
                 <a:solidFill>
-                  <a:srgbClr val="1E293B"/>
+                  <a:srgbClr val="0F2942"/>
                 </a:solidFill>
               </a:defRPr>
             </a:pPr>
@@ -5140,7 +5140,7 @@
               </a:defRPr>
             </a:pPr>
             <a:r>
-              <a:t>SyncGuard AI | AS-IS 프로세스 정의서</a:t>
+              <a:t>SyncFlow AI | AS-IS 프로세스 정의서</a:t>
             </a:r>
           </a:p>
         </p:txBody>
@@ -5295,7 +5295,7 @@
                         </a:defRPr>
                       </a:pPr>
                       <a:r>
-                        <a:t>목표 모델 (TO-BE, SyncGuard AI)</a:t>
+                        <a:t>목표 모델 (TO-BE, SyncFlow AI)</a:t>
                       </a:r>
                     </a:p>
                   </a:txBody>
@@ -5338,12 +5338,12 @@
                       <a:pPr>
                         <a:defRPr sz="950" b="1">
                           <a:solidFill>
-                            <a:srgbClr val="1E293B"/>
+                            <a:srgbClr val="0F2942"/>
                           </a:solidFill>
                         </a:defRPr>
                       </a:pPr>
                       <a:r>
-                        <a:t>심의 접수 채널</a:t>
+                        <a:t>검증 접수 채널</a:t>
                       </a:r>
                     </a:p>
                   </a:txBody>
@@ -5361,7 +5361,7 @@
                       <a:pPr>
                         <a:defRPr sz="950">
                           <a:solidFill>
-                            <a:srgbClr val="334155"/>
+                            <a:srgbClr val="1E3A5F"/>
                           </a:solidFill>
                         </a:defRPr>
                       </a:pPr>
@@ -5384,12 +5384,12 @@
                       <a:pPr>
                         <a:defRPr sz="950">
                           <a:solidFill>
-                            <a:srgbClr val="334155"/>
+                            <a:srgbClr val="1E3A5F"/>
                           </a:solidFill>
                         </a:defRPr>
                       </a:pPr>
                       <a:r>
-                        <a:t>통합 심의 웹 포털 (Vben Admin) 일원화</a:t>
+                        <a:t>통합 검증 웹 포털 (Vben Admin) 일원화</a:t>
                       </a:r>
                     </a:p>
                   </a:txBody>
@@ -5432,12 +5432,12 @@
                       <a:pPr>
                         <a:defRPr sz="950" b="1">
                           <a:solidFill>
-                            <a:srgbClr val="1E293B"/>
+                            <a:srgbClr val="0F2942"/>
                           </a:solidFill>
                         </a:defRPr>
                       </a:pPr>
                       <a:r>
-                        <a:t>원료 규격 대조</a:t>
+                        <a:t>원소재 규격 대조</a:t>
                       </a:r>
                     </a:p>
                   </a:txBody>
@@ -5455,12 +5455,12 @@
                       <a:pPr>
                         <a:defRPr sz="950">
                           <a:solidFill>
-                            <a:srgbClr val="334155"/>
+                            <a:srgbClr val="1E3A5F"/>
                           </a:solidFill>
                         </a:defRPr>
                       </a:pPr>
                       <a:r>
-                        <a:t>ProductLab 시스템 개별 로그인 수기 확인</a:t>
+                        <a:t>PLM-Nexus 시스템 개별 로그인 수기 확인</a:t>
                       </a:r>
                     </a:p>
                   </a:txBody>
@@ -5478,12 +5478,12 @@
                       <a:pPr>
                         <a:defRPr sz="950">
                           <a:solidFill>
-                            <a:srgbClr val="334155"/>
+                            <a:srgbClr val="1E3A5F"/>
                           </a:solidFill>
                         </a:defRPr>
                       </a:pPr>
                       <a:r>
-                        <a:t>제품 코드 기반 ProductLab REST API 자동 연동</a:t>
+                        <a:t>제품 코드 기반 PLM-Nexus REST API 자동 연동</a:t>
                       </a:r>
                     </a:p>
                   </a:txBody>
@@ -5526,7 +5526,7 @@
                       <a:pPr>
                         <a:defRPr sz="950" b="1">
                           <a:solidFill>
-                            <a:srgbClr val="1E293B"/>
+                            <a:srgbClr val="0F2942"/>
                           </a:solidFill>
                         </a:defRPr>
                       </a:pPr>
@@ -5549,12 +5549,12 @@
                       <a:pPr>
                         <a:defRPr sz="950">
                           <a:solidFill>
-                            <a:srgbClr val="334155"/>
+                            <a:srgbClr val="1E3A5F"/>
                           </a:solidFill>
                         </a:defRPr>
                       </a:pPr>
                       <a:r>
-                        <a:t>RA 담당자 경험 기반 수기 법령 검색</a:t>
+                        <a:t>법무·QA 담당자 경험 기반 수기 법령 검색</a:t>
                       </a:r>
                     </a:p>
                   </a:txBody>
@@ -5572,7 +5572,7 @@
                       <a:pPr>
                         <a:defRPr sz="950">
                           <a:solidFill>
-                            <a:srgbClr val="334155"/>
+                            <a:srgbClr val="1E3A5F"/>
                           </a:solidFill>
                         </a:defRPr>
                       </a:pPr>
@@ -5620,12 +5620,12 @@
                       <a:pPr>
                         <a:defRPr sz="950" b="1">
                           <a:solidFill>
-                            <a:srgbClr val="1E293B"/>
+                            <a:srgbClr val="0F2942"/>
                           </a:solidFill>
                         </a:defRPr>
                       </a:pPr>
                       <a:r>
-                        <a:t>이미지/PDP 심의</a:t>
+                        <a:t>이미지/PDP 검증</a:t>
                       </a:r>
                     </a:p>
                   </a:txBody>
@@ -5643,12 +5643,12 @@
                       <a:pPr>
                         <a:defRPr sz="950">
                           <a:solidFill>
-                            <a:srgbClr val="334155"/>
+                            <a:srgbClr val="1E3A5F"/>
                           </a:solidFill>
                         </a:defRPr>
                       </a:pPr>
                       <a:r>
-                        <a:t>육안으로 문안 일일이 읽고 타이핑 대조</a:t>
+                        <a:t>육안으로 계약조항 일일이 읽고 타이핑 대조</a:t>
                       </a:r>
                     </a:p>
                   </a:txBody>
@@ -5666,7 +5666,7 @@
                       <a:pPr>
                         <a:defRPr sz="950">
                           <a:solidFill>
-                            <a:srgbClr val="334155"/>
+                            <a:srgbClr val="1E3A5F"/>
                           </a:solidFill>
                         </a:defRPr>
                       </a:pPr>
@@ -5714,7 +5714,7 @@
                       <a:pPr>
                         <a:defRPr sz="950" b="1">
                           <a:solidFill>
-                            <a:srgbClr val="1E293B"/>
+                            <a:srgbClr val="0F2942"/>
                           </a:solidFill>
                         </a:defRPr>
                       </a:pPr>
@@ -5737,12 +5737,12 @@
                       <a:pPr>
                         <a:defRPr sz="950">
                           <a:solidFill>
-                            <a:srgbClr val="334155"/>
+                            <a:srgbClr val="1E3A5F"/>
                           </a:solidFill>
                         </a:defRPr>
                       </a:pPr>
                       <a:r>
-                        <a:t>불가 통보 위주 (마케터가 재작성)</a:t>
+                        <a:t>불가 통보 위주 (구매담당자가 재작성)</a:t>
                       </a:r>
                     </a:p>
                   </a:txBody>
@@ -5760,12 +5760,12 @@
                       <a:pPr>
                         <a:defRPr sz="950">
                           <a:solidFill>
-                            <a:srgbClr val="334155"/>
+                            <a:srgbClr val="1E3A5F"/>
                           </a:solidFill>
                         </a:defRPr>
                       </a:pPr>
                       <a:r>
-                        <a:t>AI 문맥 기반 대체 추천 문구(100종) 즉시 제공</a:t>
+                        <a:t>AI 문맥 기반 대체 추천 조항(100종) 즉시 제공</a:t>
                       </a:r>
                     </a:p>
                   </a:txBody>
@@ -5961,7 +5961,7 @@
             <a:pPr algn="r">
               <a:defRPr sz="1000" b="1">
                 <a:solidFill>
-                  <a:srgbClr val="1E293B"/>
+                  <a:srgbClr val="0F2942"/>
                 </a:solidFill>
               </a:defRPr>
             </a:pPr>
@@ -6046,7 +6046,7 @@
               </a:defRPr>
             </a:pPr>
             <a:r>
-              <a:t>SyncGuard AI | AS-IS 프로세스 정의서</a:t>
+              <a:t>SyncFlow AI | AS-IS 프로세스 정의서</a:t>
             </a:r>
           </a:p>
         </p:txBody>
@@ -6202,7 +6202,7 @@
               </a:spcBef>
               <a:defRPr sz="1000">
                 <a:solidFill>
-                  <a:srgbClr val="334155"/>
+                  <a:srgbClr val="1E3A5F"/>
                 </a:solidFill>
               </a:defRPr>
             </a:pPr>
@@ -6217,12 +6217,12 @@
               </a:spcBef>
               <a:defRPr sz="1000">
                 <a:solidFill>
-                  <a:srgbClr val="334155"/>
-                </a:solidFill>
-              </a:defRPr>
-            </a:pPr>
-            <a:r>
-              <a:t>✔ 사내 핵심 인프라 무결 연동: ProductLab(원료), MarketingHub(결재), 사내 SSO 로그인 및 KT 문자 알림 채널을 하나로 통합 연계.</a:t>
+                  <a:srgbClr val="1E3A5F"/>
+                </a:solidFill>
+              </a:defRPr>
+            </a:pPr>
+            <a:r>
+              <a:t>✔ 사내 핵심 인프라 무결 연동: PLM-Nexus(원소재), SRM-Portal(결재), 사내 SSO 로그인 및 KT 문자 알림 채널을 하나로 통합 연계.</a:t>
             </a:r>
           </a:p>
           <a:p>
@@ -6232,12 +6232,12 @@
               </a:spcBef>
               <a:defRPr sz="1000">
                 <a:solidFill>
-                  <a:srgbClr val="334155"/>
-                </a:solidFill>
-              </a:defRPr>
-            </a:pPr>
-            <a:r>
-              <a:t>✔ 심의 히스토리 전사 데이터베이스화: 판정 이력 및 마케팅 피드백 데이터를 누적 적재하여 미래 브랜드 문안 기획의 지식 자산으로 활용.</a:t>
+                  <a:srgbClr val="1E3A5F"/>
+                </a:solidFill>
+              </a:defRPr>
+            </a:pPr>
+            <a:r>
+              <a:t>✔ 검증 히스토리 전사 데이터베이스화: 판정 이력 및 구매조달 피드백 데이터를 누적 적재하여 미래 사업본부 계약조항 기획의 지식 자산으로 활용.</a:t>
             </a:r>
           </a:p>
           <a:p>
@@ -6247,12 +6247,12 @@
               </a:spcBef>
               <a:defRPr sz="1000">
                 <a:solidFill>
-                  <a:srgbClr val="334155"/>
-                </a:solidFill>
-              </a:defRPr>
-            </a:pPr>
-            <a:r>
-              <a:t>✔ 시범운영(Pilot) 및 실무 피드백 안착: 11개 주요 브랜드 142건 실데이터 검증을 통해 현업 수용성을 극대화하고 즉각적 업무 전환 유도.</a:t>
+                  <a:srgbClr val="1E3A5F"/>
+                </a:solidFill>
+              </a:defRPr>
+            </a:pPr>
+            <a:r>
+              <a:t>✔ 시범운영(Pilot) 및 실무 피드백 안착: 11개 주요 사업본부 142건 실데이터 검증을 통해 현업 수용성을 극대화하고 즉각적 업무 전환 유도.</a:t>
             </a:r>
           </a:p>
         </p:txBody>
@@ -6415,7 +6415,7 @@
             <a:pPr algn="r">
               <a:defRPr sz="1000" b="1">
                 <a:solidFill>
-                  <a:srgbClr val="1E293B"/>
+                  <a:srgbClr val="0F2942"/>
                 </a:solidFill>
               </a:defRPr>
             </a:pPr>
@@ -6500,7 +6500,7 @@
               </a:defRPr>
             </a:pPr>
             <a:r>
-              <a:t>SyncGuard AI | AS-IS 프로세스 정의서</a:t>
+              <a:t>SyncFlow AI | AS-IS 프로세스 정의서</a:t>
             </a:r>
           </a:p>
         </p:txBody>
@@ -6641,12 +6641,12 @@
             <a:pPr>
               <a:defRPr b="1" sz="1200">
                 <a:solidFill>
-                  <a:srgbClr val="1E293B"/>
-                </a:solidFill>
-              </a:defRPr>
-            </a:pPr>
-            <a:r>
-              <a:t>심의 처리 시간</a:t>
+                  <a:srgbClr val="0F2942"/>
+                </a:solidFill>
+              </a:defRPr>
+            </a:pPr>
+            <a:r>
+              <a:t>검증 처리 시간</a:t>
             </a:r>
           </a:p>
           <a:p>
@@ -6671,7 +6671,7 @@
               </a:spcBef>
               <a:defRPr sz="1000">
                 <a:solidFill>
-                  <a:srgbClr val="334155"/>
+                  <a:srgbClr val="1E3A5F"/>
                 </a:solidFill>
               </a:defRPr>
             </a:pPr>
@@ -6751,12 +6751,12 @@
             <a:pPr>
               <a:defRPr b="1" sz="1200">
                 <a:solidFill>
-                  <a:srgbClr val="1E293B"/>
-                </a:solidFill>
-              </a:defRPr>
-            </a:pPr>
-            <a:r>
-              <a:t>월간 심의 용량</a:t>
+                  <a:srgbClr val="0F2942"/>
+                </a:solidFill>
+              </a:defRPr>
+            </a:pPr>
+            <a:r>
+              <a:t>월간 검증 용량</a:t>
             </a:r>
           </a:p>
           <a:p>
@@ -6781,7 +6781,7 @@
               </a:spcBef>
               <a:defRPr sz="1000">
                 <a:solidFill>
-                  <a:srgbClr val="334155"/>
+                  <a:srgbClr val="1E3A5F"/>
                 </a:solidFill>
               </a:defRPr>
             </a:pPr>
@@ -6861,12 +6861,12 @@
             <a:pPr>
               <a:defRPr b="1" sz="1200">
                 <a:solidFill>
-                  <a:srgbClr val="1E293B"/>
-                </a:solidFill>
-              </a:defRPr>
-            </a:pPr>
-            <a:r>
-              <a:t>RA 일치율</a:t>
+                  <a:srgbClr val="0F2942"/>
+                </a:solidFill>
+              </a:defRPr>
+            </a:pPr>
+            <a:r>
+              <a:t>QA 일치율</a:t>
             </a:r>
           </a:p>
           <a:p>
@@ -6891,7 +6891,7 @@
               </a:spcBef>
               <a:defRPr sz="1000">
                 <a:solidFill>
-                  <a:srgbClr val="334155"/>
+                  <a:srgbClr val="1E3A5F"/>
                 </a:solidFill>
               </a:defRPr>
             </a:pPr>
@@ -6971,7 +6971,7 @@
             <a:pPr>
               <a:defRPr b="1" sz="1200">
                 <a:solidFill>
-                  <a:srgbClr val="1E293B"/>
+                  <a:srgbClr val="0F2942"/>
                 </a:solidFill>
               </a:defRPr>
             </a:pPr>
@@ -7001,12 +7001,12 @@
               </a:spcBef>
               <a:defRPr sz="1000">
                 <a:solidFill>
-                  <a:srgbClr val="334155"/>
-                </a:solidFill>
-              </a:defRPr>
-            </a:pPr>
-            <a:r>
-              <a:t>사전 필터링으로 행정처분 차단</a:t>
+                  <a:srgbClr val="1E3A5F"/>
+                </a:solidFill>
+              </a:defRPr>
+            </a:pPr>
+            <a:r>
+              <a:t>사전 필터링으로 시정명령·심결 차단</a:t>
             </a:r>
           </a:p>
         </p:txBody>
